--- a/documents/deck/sample.pptx
+++ b/documents/deck/sample.pptx
@@ -7,9 +7,12 @@
   <p:sldIdLst>
     <p:sldId id="256" r:id="rId2"/>
     <p:sldId id="257" r:id="rId3"/>
+    <p:sldId id="258" r:id="rId4"/>
+    <p:sldId id="259" r:id="rId5"/>
+    <p:sldId id="260" r:id="rId6"/>
   </p:sldIdLst>
   <p:notesMasterIdLst>
-    <p:notesMasterId r:id="rId4"/>
+    <p:notesMasterId r:id="rId7"/>
   </p:notesMasterIdLst>
   <p:sldSz cx="12192000" cy="6858000"/>
   <p:notesSz cx="6858000" cy="12192000"/>
@@ -633,6 +636,270 @@
 </p:notes>
 </file>
 
+<file path=ppt/notesSlides/notesSlide3.xml><?xml version="1.0" encoding="utf-8"?>
+<p:notes xmlns:a="http://schemas.openxmlformats.org/drawingml/2006/main" xmlns:r="http://schemas.openxmlformats.org/officeDocument/2006/relationships" xmlns:p="http://schemas.openxmlformats.org/presentationml/2006/main">
+  <p:cSld>
+    <p:spTree>
+      <p:nvGrpSpPr>
+        <p:cNvPr id="1" name=""/>
+        <p:cNvGrpSpPr/>
+        <p:nvPr/>
+      </p:nvGrpSpPr>
+      <p:grpSpPr>
+        <a:xfrm>
+          <a:off x="0" y="0"/>
+          <a:ext cx="0" cy="0"/>
+          <a:chOff x="0" y="0"/>
+          <a:chExt cx="0" cy="0"/>
+        </a:xfrm>
+      </p:grpSpPr>
+      <p:sp>
+        <p:nvSpPr>
+          <p:cNvPr id="2" name="Slide Image Placeholder 1"/>
+          <p:cNvSpPr>
+            <a:spLocks noGrp="1" noRot="1" noChangeAspect="1"/>
+          </p:cNvSpPr>
+          <p:nvPr>
+            <p:ph type="sldImg"/>
+          </p:nvPr>
+        </p:nvSpPr>
+        <p:spPr/>
+      </p:sp>
+      <p:sp>
+        <p:nvSpPr>
+          <p:cNvPr id="3" name="Notes Placeholder 2"/>
+          <p:cNvSpPr>
+            <a:spLocks noGrp="1"/>
+          </p:cNvSpPr>
+          <p:nvPr>
+            <p:ph type="body" idx="1"/>
+          </p:nvPr>
+        </p:nvSpPr>
+        <p:spPr/>
+        <p:txBody>
+          <a:bodyPr/>
+          <a:lstStyle/>
+          <a:p>
+            <a:r>
+              <a:rPr lang="en-US" dirty="0"/>
+              <a:t/>
+            </a:r>
+            <a:endParaRPr lang="en-US" dirty="0"/>
+          </a:p>
+        </p:txBody>
+      </p:sp>
+      <p:sp>
+        <p:nvSpPr>
+          <p:cNvPr id="4" name="Slide Number Placeholder 3"/>
+          <p:cNvSpPr>
+            <a:spLocks noGrp="1"/>
+          </p:cNvSpPr>
+          <p:nvPr>
+            <p:ph type="sldNum" sz="quarter" idx="10"/>
+          </p:nvPr>
+        </p:nvSpPr>
+        <p:spPr/>
+        <p:txBody>
+          <a:bodyPr/>
+          <a:lstStyle/>
+          <a:p>
+            <a:fld id="{F7021451-1387-4CA6-816F-3879F97B5CBC}" type="slidenum">
+              <a:rPr lang="en-US"/>
+              <a:t>3</a:t>
+            </a:fld>
+            <a:endParaRPr lang="en-US"/>
+          </a:p>
+        </p:txBody>
+      </p:sp>
+    </p:spTree>
+    <p:extLst>
+      <p:ext uri="{BB962C8B-B14F-4D97-AF65-F5344CB8AC3E}">
+        <p14:creationId xmlns:p14="http://schemas.microsoft.com/office/powerpoint/2010/main" val="1024086991"/>
+      </p:ext>
+    </p:extLst>
+  </p:cSld>
+  <p:clrMapOvr>
+    <a:masterClrMapping/>
+  </p:clrMapOvr>
+</p:notes>
+</file>
+
+<file path=ppt/notesSlides/notesSlide4.xml><?xml version="1.0" encoding="utf-8"?>
+<p:notes xmlns:a="http://schemas.openxmlformats.org/drawingml/2006/main" xmlns:r="http://schemas.openxmlformats.org/officeDocument/2006/relationships" xmlns:p="http://schemas.openxmlformats.org/presentationml/2006/main">
+  <p:cSld>
+    <p:spTree>
+      <p:nvGrpSpPr>
+        <p:cNvPr id="1" name=""/>
+        <p:cNvGrpSpPr/>
+        <p:nvPr/>
+      </p:nvGrpSpPr>
+      <p:grpSpPr>
+        <a:xfrm>
+          <a:off x="0" y="0"/>
+          <a:ext cx="0" cy="0"/>
+          <a:chOff x="0" y="0"/>
+          <a:chExt cx="0" cy="0"/>
+        </a:xfrm>
+      </p:grpSpPr>
+      <p:sp>
+        <p:nvSpPr>
+          <p:cNvPr id="2" name="Slide Image Placeholder 1"/>
+          <p:cNvSpPr>
+            <a:spLocks noGrp="1" noRot="1" noChangeAspect="1"/>
+          </p:cNvSpPr>
+          <p:nvPr>
+            <p:ph type="sldImg"/>
+          </p:nvPr>
+        </p:nvSpPr>
+        <p:spPr/>
+      </p:sp>
+      <p:sp>
+        <p:nvSpPr>
+          <p:cNvPr id="3" name="Notes Placeholder 2"/>
+          <p:cNvSpPr>
+            <a:spLocks noGrp="1"/>
+          </p:cNvSpPr>
+          <p:nvPr>
+            <p:ph type="body" idx="1"/>
+          </p:nvPr>
+        </p:nvSpPr>
+        <p:spPr/>
+        <p:txBody>
+          <a:bodyPr/>
+          <a:lstStyle/>
+          <a:p>
+            <a:r>
+              <a:rPr lang="en-US" dirty="0"/>
+              <a:t/>
+            </a:r>
+            <a:endParaRPr lang="en-US" dirty="0"/>
+          </a:p>
+        </p:txBody>
+      </p:sp>
+      <p:sp>
+        <p:nvSpPr>
+          <p:cNvPr id="4" name="Slide Number Placeholder 3"/>
+          <p:cNvSpPr>
+            <a:spLocks noGrp="1"/>
+          </p:cNvSpPr>
+          <p:nvPr>
+            <p:ph type="sldNum" sz="quarter" idx="10"/>
+          </p:nvPr>
+        </p:nvSpPr>
+        <p:spPr/>
+        <p:txBody>
+          <a:bodyPr/>
+          <a:lstStyle/>
+          <a:p>
+            <a:fld id="{F7021451-1387-4CA6-816F-3879F97B5CBC}" type="slidenum">
+              <a:rPr lang="en-US"/>
+              <a:t>4</a:t>
+            </a:fld>
+            <a:endParaRPr lang="en-US"/>
+          </a:p>
+        </p:txBody>
+      </p:sp>
+    </p:spTree>
+    <p:extLst>
+      <p:ext uri="{BB962C8B-B14F-4D97-AF65-F5344CB8AC3E}">
+        <p14:creationId xmlns:p14="http://schemas.microsoft.com/office/powerpoint/2010/main" val="1024086991"/>
+      </p:ext>
+    </p:extLst>
+  </p:cSld>
+  <p:clrMapOvr>
+    <a:masterClrMapping/>
+  </p:clrMapOvr>
+</p:notes>
+</file>
+
+<file path=ppt/notesSlides/notesSlide5.xml><?xml version="1.0" encoding="utf-8"?>
+<p:notes xmlns:a="http://schemas.openxmlformats.org/drawingml/2006/main" xmlns:r="http://schemas.openxmlformats.org/officeDocument/2006/relationships" xmlns:p="http://schemas.openxmlformats.org/presentationml/2006/main">
+  <p:cSld>
+    <p:spTree>
+      <p:nvGrpSpPr>
+        <p:cNvPr id="1" name=""/>
+        <p:cNvGrpSpPr/>
+        <p:nvPr/>
+      </p:nvGrpSpPr>
+      <p:grpSpPr>
+        <a:xfrm>
+          <a:off x="0" y="0"/>
+          <a:ext cx="0" cy="0"/>
+          <a:chOff x="0" y="0"/>
+          <a:chExt cx="0" cy="0"/>
+        </a:xfrm>
+      </p:grpSpPr>
+      <p:sp>
+        <p:nvSpPr>
+          <p:cNvPr id="2" name="Slide Image Placeholder 1"/>
+          <p:cNvSpPr>
+            <a:spLocks noGrp="1" noRot="1" noChangeAspect="1"/>
+          </p:cNvSpPr>
+          <p:nvPr>
+            <p:ph type="sldImg"/>
+          </p:nvPr>
+        </p:nvSpPr>
+        <p:spPr/>
+      </p:sp>
+      <p:sp>
+        <p:nvSpPr>
+          <p:cNvPr id="3" name="Notes Placeholder 2"/>
+          <p:cNvSpPr>
+            <a:spLocks noGrp="1"/>
+          </p:cNvSpPr>
+          <p:nvPr>
+            <p:ph type="body" idx="1"/>
+          </p:nvPr>
+        </p:nvSpPr>
+        <p:spPr/>
+        <p:txBody>
+          <a:bodyPr/>
+          <a:lstStyle/>
+          <a:p>
+            <a:r>
+              <a:rPr lang="en-US" dirty="0"/>
+              <a:t/>
+            </a:r>
+            <a:endParaRPr lang="en-US" dirty="0"/>
+          </a:p>
+        </p:txBody>
+      </p:sp>
+      <p:sp>
+        <p:nvSpPr>
+          <p:cNvPr id="4" name="Slide Number Placeholder 3"/>
+          <p:cNvSpPr>
+            <a:spLocks noGrp="1"/>
+          </p:cNvSpPr>
+          <p:nvPr>
+            <p:ph type="sldNum" sz="quarter" idx="10"/>
+          </p:nvPr>
+        </p:nvSpPr>
+        <p:spPr/>
+        <p:txBody>
+          <a:bodyPr/>
+          <a:lstStyle/>
+          <a:p>
+            <a:fld id="{F7021451-1387-4CA6-816F-3879F97B5CBC}" type="slidenum">
+              <a:rPr lang="en-US"/>
+              <a:t>5</a:t>
+            </a:fld>
+            <a:endParaRPr lang="en-US"/>
+          </a:p>
+        </p:txBody>
+      </p:sp>
+    </p:spTree>
+    <p:extLst>
+      <p:ext uri="{BB962C8B-B14F-4D97-AF65-F5344CB8AC3E}">
+        <p14:creationId xmlns:p14="http://schemas.microsoft.com/office/powerpoint/2010/main" val="1024086991"/>
+      </p:ext>
+    </p:extLst>
+  </p:cSld>
+  <p:clrMapOvr>
+    <a:masterClrMapping/>
+  </p:clrMapOvr>
+</p:notes>
+</file>
+
 <file path=ppt/slideLayouts/slideLayout1.xml><?xml version="1.0" encoding="utf-8"?>
 <p:sldLayout xmlns:a="http://schemas.openxmlformats.org/drawingml/2006/main" xmlns:r="http://schemas.openxmlformats.org/officeDocument/2006/relationships" xmlns:p="http://schemas.openxmlformats.org/presentationml/2006/main" preserve="1">
   <p:cSld name="DEFAULT">
@@ -972,6 +1239,89 @@
         </p:nvSpPr>
         <p:spPr>
           <a:xfrm>
+            <a:off x="8534095" y="-1828800"/>
+            <a:ext cx="5943600" cy="5943600"/>
+          </a:xfrm>
+          <a:prstGeom prst="ellipse">
+            <a:avLst/>
+          </a:prstGeom>
+          <a:solidFill>
+            <a:srgbClr val="2563EB">
+              <a:alpha val="10000"/>
+            </a:srgbClr>
+          </a:solidFill>
+          <a:ln w="12700">
+            <a:solidFill>
+              <a:srgbClr val="2563EB">
+                <a:alpha val="10000"/>
+              </a:srgbClr>
+            </a:solidFill>
+            <a:prstDash val="solid"/>
+          </a:ln>
+        </p:spPr>
+      </p:sp>
+      <p:sp>
+        <p:nvSpPr>
+          <p:cNvPr id="3" name="Shape 1"/>
+          <p:cNvSpPr/>
+          <p:nvPr/>
+        </p:nvSpPr>
+        <p:spPr>
+          <a:xfrm>
+            <a:off x="9997135" y="3657600"/>
+            <a:ext cx="3657600" cy="3657600"/>
+          </a:xfrm>
+          <a:prstGeom prst="ellipse">
+            <a:avLst/>
+          </a:prstGeom>
+          <a:solidFill>
+            <a:srgbClr val="10A37F">
+              <a:alpha val="12000"/>
+            </a:srgbClr>
+          </a:solidFill>
+          <a:ln w="12700">
+            <a:solidFill>
+              <a:srgbClr val="10A37F">
+                <a:alpha val="12000"/>
+              </a:srgbClr>
+            </a:solidFill>
+            <a:prstDash val="solid"/>
+          </a:ln>
+        </p:spPr>
+      </p:sp>
+      <p:sp>
+        <p:nvSpPr>
+          <p:cNvPr id="4" name="Shape 2"/>
+          <p:cNvSpPr/>
+          <p:nvPr/>
+        </p:nvSpPr>
+        <p:spPr>
+          <a:xfrm>
+            <a:off x="11643055" y="2286000"/>
+            <a:ext cx="548640" cy="2286000"/>
+          </a:xfrm>
+          <a:prstGeom prst="rect">
+            <a:avLst/>
+          </a:prstGeom>
+          <a:solidFill>
+            <a:srgbClr val="2563EB"/>
+          </a:solidFill>
+          <a:ln w="12700">
+            <a:solidFill>
+              <a:srgbClr val="2563EB"/>
+            </a:solidFill>
+            <a:prstDash val="solid"/>
+          </a:ln>
+        </p:spPr>
+      </p:sp>
+      <p:sp>
+        <p:nvSpPr>
+          <p:cNvPr id="5" name="Shape 3"/>
+          <p:cNvSpPr/>
+          <p:nvPr/>
+        </p:nvSpPr>
+        <p:spPr>
+          <a:xfrm>
             <a:off x="0" y="0"/>
             <a:ext cx="12191695" cy="164592"/>
           </a:xfrm>
@@ -991,7 +1341,7 @@
       </p:sp>
       <p:pic>
         <p:nvPicPr>
-          <p:cNvPr id="3" name="Image 0" descr="/Users/muhammadrayandika/repo/document-agent/brand/logo.png">    </p:cNvPr>
+          <p:cNvPr id="6" name="Image 0" descr="/Users/muhammadrayandika/repo/document-agent/brand/logo.png">    </p:cNvPr>
           <p:cNvPicPr>
             <a:picLocks noChangeAspect="1"/>
           </p:cNvPicPr>
@@ -1015,7 +1365,7 @@
       </p:pic>
       <p:sp>
         <p:nvSpPr>
-          <p:cNvPr id="4" name="Text 1"/>
+          <p:cNvPr id="7" name="Text 4"/>
           <p:cNvSpPr/>
           <p:nvPr/>
         </p:nvSpPr>
@@ -1054,14 +1404,14 @@
       </p:sp>
       <p:sp>
         <p:nvSpPr>
-          <p:cNvPr id="5" name="Text 2"/>
+          <p:cNvPr id="8" name="Text 5"/>
           <p:cNvSpPr/>
           <p:nvPr/>
         </p:nvSpPr>
         <p:spPr>
           <a:xfrm>
             <a:off x="548640" y="2468880"/>
-            <a:ext cx="11094415" cy="1188720"/>
+            <a:ext cx="8229600" cy="1554480"/>
           </a:xfrm>
           <a:prstGeom prst="rect">
             <a:avLst/>
@@ -1077,7 +1427,7 @@
               <a:buNone/>
             </a:pPr>
             <a:r>
-              <a:rPr lang="en-US" sz="4400" b="1" dirty="0">
+              <a:rPr lang="en-US" sz="4200" b="1" dirty="0">
                 <a:solidFill>
                   <a:srgbClr val="141B2E"/>
                 </a:solidFill>
@@ -1087,14 +1437,14 @@
               </a:rPr>
               <a:t>AI Customer Intelligence</a:t>
             </a:r>
-            <a:endParaRPr lang="en-US" sz="4400" dirty="0"/>
+            <a:endParaRPr lang="en-US" sz="4200" dirty="0"/>
           </a:p>
           <a:p>
             <a:pPr algn="l" indent="0" marL="0">
               <a:buNone/>
             </a:pPr>
             <a:r>
-              <a:rPr lang="en-US" sz="4400" b="1" dirty="0">
+              <a:rPr lang="en-US" sz="4200" b="1" dirty="0">
                 <a:solidFill>
                   <a:srgbClr val="141B2E"/>
                 </a:solidFill>
@@ -1104,20 +1454,20 @@
               </a:rPr>
               <a:t>Platform</a:t>
             </a:r>
-            <a:endParaRPr lang="en-US" sz="4400" dirty="0"/>
-          </a:p>
-        </p:txBody>
-      </p:sp>
-      <p:sp>
-        <p:nvSpPr>
-          <p:cNvPr id="6" name="Text 3"/>
-          <p:cNvSpPr/>
-          <p:nvPr/>
-        </p:nvSpPr>
-        <p:spPr>
-          <a:xfrm>
-            <a:off x="548640" y="3657600"/>
-            <a:ext cx="11094415" cy="548640"/>
+            <a:endParaRPr lang="en-US" sz="4200" dirty="0"/>
+          </a:p>
+        </p:txBody>
+      </p:sp>
+      <p:sp>
+        <p:nvSpPr>
+          <p:cNvPr id="9" name="Text 6"/>
+          <p:cNvSpPr/>
+          <p:nvPr/>
+        </p:nvSpPr>
+        <p:spPr>
+          <a:xfrm>
+            <a:off x="548640" y="4069080"/>
+            <a:ext cx="8229600" cy="914400"/>
           </a:xfrm>
           <a:prstGeom prst="rect">
             <a:avLst/>
@@ -1126,14 +1476,14 @@
           <a:ln/>
         </p:spPr>
         <p:txBody>
-          <a:bodyPr wrap="square" rtlCol="0" anchor="ctr"/>
+          <a:bodyPr wrap="square" rtlCol="0" anchor="t"/>
           <a:lstStyle/>
           <a:p>
             <a:pPr algn="l" indent="0" marL="0">
               <a:buNone/>
             </a:pPr>
             <a:r>
-              <a:rPr lang="en-US" sz="2000" dirty="0">
+              <a:rPr lang="en-US" sz="1700" dirty="0">
                 <a:solidFill>
                   <a:srgbClr val="6E7990"/>
                 </a:solidFill>
@@ -1143,19 +1493,19 @@
               </a:rPr>
               <a:t>AI-powered insights untuk tim sales &amp; customer success</a:t>
             </a:r>
-            <a:endParaRPr lang="en-US" sz="2000" dirty="0"/>
-          </a:p>
-        </p:txBody>
-      </p:sp>
-      <p:sp>
-        <p:nvSpPr>
-          <p:cNvPr id="7" name="Shape 4"/>
-          <p:cNvSpPr/>
-          <p:nvPr/>
-        </p:nvSpPr>
-        <p:spPr>
-          <a:xfrm>
-            <a:off x="548640" y="4937760"/>
+            <a:endParaRPr lang="en-US" sz="1700" dirty="0"/>
+          </a:p>
+        </p:txBody>
+      </p:sp>
+      <p:sp>
+        <p:nvSpPr>
+          <p:cNvPr id="10" name="Shape 7"/>
+          <p:cNvSpPr/>
+          <p:nvPr/>
+        </p:nvSpPr>
+        <p:spPr>
+          <a:xfrm>
+            <a:off x="548640" y="5120640"/>
             <a:ext cx="548640" cy="73152"/>
           </a:xfrm>
           <a:prstGeom prst="rect">
@@ -1174,13 +1524,13 @@
       </p:sp>
       <p:sp>
         <p:nvSpPr>
-          <p:cNvPr id="8" name="Text 5"/>
-          <p:cNvSpPr/>
-          <p:nvPr/>
-        </p:nvSpPr>
-        <p:spPr>
-          <a:xfrm>
-            <a:off x="548640" y="5212080"/>
+          <p:cNvPr id="11" name="Text 8"/>
+          <p:cNvSpPr/>
+          <p:nvPr/>
+        </p:nvSpPr>
+        <p:spPr>
+          <a:xfrm>
+            <a:off x="548640" y="5349240"/>
             <a:ext cx="3657600" cy="274320"/>
           </a:xfrm>
           <a:prstGeom prst="rect">
@@ -1213,13 +1563,13 @@
       </p:sp>
       <p:sp>
         <p:nvSpPr>
-          <p:cNvPr id="9" name="Text 6"/>
-          <p:cNvSpPr/>
-          <p:nvPr/>
-        </p:nvSpPr>
-        <p:spPr>
-          <a:xfrm>
-            <a:off x="548640" y="5486400"/>
+          <p:cNvPr id="12" name="Text 9"/>
+          <p:cNvSpPr/>
+          <p:nvPr/>
+        </p:nvSpPr>
+        <p:spPr>
+          <a:xfrm>
+            <a:off x="548640" y="5623560"/>
             <a:ext cx="5486400" cy="457200"/>
           </a:xfrm>
           <a:prstGeom prst="rect">
@@ -1252,13 +1602,13 @@
       </p:sp>
       <p:sp>
         <p:nvSpPr>
-          <p:cNvPr id="10" name="Text 7"/>
-          <p:cNvSpPr/>
-          <p:nvPr/>
-        </p:nvSpPr>
-        <p:spPr>
-          <a:xfrm>
-            <a:off x="9448495" y="5212080"/>
+          <p:cNvPr id="13" name="Text 10"/>
+          <p:cNvSpPr/>
+          <p:nvPr/>
+        </p:nvSpPr>
+        <p:spPr>
+          <a:xfrm>
+            <a:off x="9448495" y="5349240"/>
             <a:ext cx="2194560" cy="274320"/>
           </a:xfrm>
           <a:prstGeom prst="rect">
@@ -1283,7 +1633,7 @@
                 <a:ea typeface="Calibri" pitchFamily="34" charset="-122"/>
                 <a:cs typeface="Calibri" pitchFamily="34" charset="-120"/>
               </a:rPr>
-              <a:t>DATE</a:t>
+              <a:t>TANGGAL</a:t>
             </a:r>
             <a:endParaRPr lang="en-US" sz="900" dirty="0"/>
           </a:p>
@@ -1291,13 +1641,13 @@
       </p:sp>
       <p:sp>
         <p:nvSpPr>
-          <p:cNvPr id="11" name="Text 8"/>
-          <p:cNvSpPr/>
-          <p:nvPr/>
-        </p:nvSpPr>
-        <p:spPr>
-          <a:xfrm>
-            <a:off x="9448495" y="5486400"/>
+          <p:cNvPr id="14" name="Text 11"/>
+          <p:cNvSpPr/>
+          <p:nvPr/>
+        </p:nvSpPr>
+        <p:spPr>
+          <a:xfrm>
+            <a:off x="9448495" y="5623560"/>
             <a:ext cx="2194560" cy="457200"/>
           </a:xfrm>
           <a:prstGeom prst="rect">
@@ -1322,7 +1672,7 @@
                 <a:ea typeface="Calibri" pitchFamily="34" charset="-122"/>
                 <a:cs typeface="Calibri" pitchFamily="34" charset="-120"/>
               </a:rPr>
-              <a:t>13 Mei 2026</a:t>
+              <a:t>14 Mei 2026</a:t>
             </a:r>
             <a:endParaRPr lang="en-US" sz="1600" dirty="0"/>
           </a:p>
@@ -1339,6 +1689,1915 @@
 <file path=ppt/slides/slide2.xml><?xml version="1.0" encoding="utf-8"?>
 <p:sld xmlns:a="http://schemas.openxmlformats.org/drawingml/2006/main" xmlns:r="http://schemas.openxmlformats.org/officeDocument/2006/relationships" xmlns:p="http://schemas.openxmlformats.org/presentationml/2006/main">
   <p:cSld name="Slide 2">
+    <p:bg>
+      <p:bgPr>
+        <a:solidFill>
+          <a:srgbClr val="FFFFFF"/>
+        </a:solidFill>
+      </p:bgPr>
+    </p:bg>
+    <p:spTree>
+      <p:nvGrpSpPr>
+        <p:cNvPr id="1" name=""/>
+        <p:cNvGrpSpPr/>
+        <p:nvPr/>
+      </p:nvGrpSpPr>
+      <p:grpSpPr>
+        <a:xfrm>
+          <a:off x="0" y="0"/>
+          <a:ext cx="0" cy="0"/>
+          <a:chOff x="0" y="0"/>
+          <a:chExt cx="0" cy="0"/>
+        </a:xfrm>
+      </p:grpSpPr>
+      <p:sp>
+        <p:nvSpPr>
+          <p:cNvPr id="2" name="Text 0"/>
+          <p:cNvSpPr/>
+          <p:nvPr/>
+        </p:nvSpPr>
+        <p:spPr>
+          <a:xfrm>
+            <a:off x="7162495" y="457200"/>
+            <a:ext cx="5029200" cy="6400800"/>
+          </a:xfrm>
+          <a:prstGeom prst="rect">
+            <a:avLst/>
+          </a:prstGeom>
+          <a:noFill/>
+          <a:ln/>
+        </p:spPr>
+        <p:txBody>
+          <a:bodyPr wrap="square" rtlCol="0" anchor="ctr"/>
+          <a:lstStyle/>
+          <a:p>
+            <a:pPr algn="r" indent="0" marL="0">
+              <a:buNone/>
+            </a:pPr>
+            <a:r>
+              <a:rPr lang="en-US" sz="48000" b="1" dirty="0">
+                <a:solidFill>
+                  <a:srgbClr val="2563EB">
+                    <a:alpha val="8000"/>
+                  </a:srgbClr>
+                </a:solidFill>
+                <a:latin typeface="Calibri" pitchFamily="34" charset="0"/>
+                <a:ea typeface="Calibri" pitchFamily="34" charset="-122"/>
+                <a:cs typeface="Calibri" pitchFamily="34" charset="-120"/>
+              </a:rPr>
+              <a:t>01</a:t>
+            </a:r>
+            <a:endParaRPr lang="en-US" sz="48000" dirty="0"/>
+          </a:p>
+        </p:txBody>
+      </p:sp>
+      <p:sp>
+        <p:nvSpPr>
+          <p:cNvPr id="3" name="Shape 1"/>
+          <p:cNvSpPr/>
+          <p:nvPr/>
+        </p:nvSpPr>
+        <p:spPr>
+          <a:xfrm>
+            <a:off x="10180015" y="-914400"/>
+            <a:ext cx="3200400" cy="3200400"/>
+          </a:xfrm>
+          <a:prstGeom prst="ellipse">
+            <a:avLst/>
+          </a:prstGeom>
+          <a:solidFill>
+            <a:srgbClr val="10A37F">
+              <a:alpha val="8000"/>
+            </a:srgbClr>
+          </a:solidFill>
+          <a:ln w="12700">
+            <a:solidFill>
+              <a:srgbClr val="10A37F">
+                <a:alpha val="8000"/>
+              </a:srgbClr>
+            </a:solidFill>
+            <a:prstDash val="solid"/>
+          </a:ln>
+        </p:spPr>
+      </p:sp>
+      <p:sp>
+        <p:nvSpPr>
+          <p:cNvPr id="4" name="Shape 2"/>
+          <p:cNvSpPr/>
+          <p:nvPr/>
+        </p:nvSpPr>
+        <p:spPr>
+          <a:xfrm>
+            <a:off x="10911535" y="-274320"/>
+            <a:ext cx="1828800" cy="1828800"/>
+          </a:xfrm>
+          <a:prstGeom prst="ellipse">
+            <a:avLst/>
+          </a:prstGeom>
+          <a:solidFill>
+            <a:srgbClr val="10A37F">
+              <a:alpha val="20000"/>
+            </a:srgbClr>
+          </a:solidFill>
+          <a:ln w="12700">
+            <a:solidFill>
+              <a:srgbClr val="10A37F">
+                <a:alpha val="20000"/>
+              </a:srgbClr>
+            </a:solidFill>
+            <a:prstDash val="solid"/>
+          </a:ln>
+        </p:spPr>
+      </p:sp>
+      <p:sp>
+        <p:nvSpPr>
+          <p:cNvPr id="5" name="Text 3"/>
+          <p:cNvSpPr/>
+          <p:nvPr/>
+        </p:nvSpPr>
+        <p:spPr>
+          <a:xfrm>
+            <a:off x="548640" y="1371600"/>
+            <a:ext cx="11094415" cy="457200"/>
+          </a:xfrm>
+          <a:prstGeom prst="rect">
+            <a:avLst/>
+          </a:prstGeom>
+          <a:noFill/>
+          <a:ln/>
+        </p:spPr>
+        <p:txBody>
+          <a:bodyPr wrap="square" rtlCol="0" anchor="ctr"/>
+          <a:lstStyle/>
+          <a:p>
+            <a:pPr indent="0" marL="0">
+              <a:buNone/>
+            </a:pPr>
+            <a:r>
+              <a:rPr lang="en-US" sz="1200" b="1" spc="600" kern="0" dirty="0">
+                <a:solidFill>
+                  <a:srgbClr val="2563EB"/>
+                </a:solidFill>
+                <a:latin typeface="Calibri" pitchFamily="34" charset="0"/>
+                <a:ea typeface="Calibri" pitchFamily="34" charset="-122"/>
+                <a:cs typeface="Calibri" pitchFamily="34" charset="-120"/>
+              </a:rPr>
+              <a:t>BAGIAN 01</a:t>
+            </a:r>
+            <a:endParaRPr lang="en-US" sz="1200" dirty="0"/>
+          </a:p>
+        </p:txBody>
+      </p:sp>
+      <p:sp>
+        <p:nvSpPr>
+          <p:cNvPr id="6" name="Text 4"/>
+          <p:cNvSpPr/>
+          <p:nvPr/>
+        </p:nvSpPr>
+        <p:spPr>
+          <a:xfrm>
+            <a:off x="548640" y="2194560"/>
+            <a:ext cx="11094415" cy="2011680"/>
+          </a:xfrm>
+          <a:prstGeom prst="rect">
+            <a:avLst/>
+          </a:prstGeom>
+          <a:noFill/>
+          <a:ln/>
+        </p:spPr>
+        <p:txBody>
+          <a:bodyPr wrap="square" rtlCol="0" anchor="t"/>
+          <a:lstStyle/>
+          <a:p>
+            <a:pPr indent="0" marL="0">
+              <a:buNone/>
+            </a:pPr>
+            <a:r>
+              <a:rPr lang="en-US" sz="4400" b="1" dirty="0">
+                <a:solidFill>
+                  <a:srgbClr val="141B2E"/>
+                </a:solidFill>
+                <a:latin typeface="Calibri" pitchFamily="34" charset="0"/>
+                <a:ea typeface="Calibri" pitchFamily="34" charset="-122"/>
+                <a:cs typeface="Calibri" pitchFamily="34" charset="-120"/>
+              </a:rPr>
+              <a:t>Mengapa AI sekarang?</a:t>
+            </a:r>
+            <a:endParaRPr lang="en-US" sz="4400" dirty="0"/>
+          </a:p>
+        </p:txBody>
+      </p:sp>
+      <p:sp>
+        <p:nvSpPr>
+          <p:cNvPr id="7" name="Shape 5"/>
+          <p:cNvSpPr/>
+          <p:nvPr/>
+        </p:nvSpPr>
+        <p:spPr>
+          <a:xfrm>
+            <a:off x="548640" y="4434840"/>
+            <a:ext cx="640080" cy="64008"/>
+          </a:xfrm>
+          <a:prstGeom prst="rect">
+            <a:avLst/>
+          </a:prstGeom>
+          <a:solidFill>
+            <a:srgbClr val="10A37F"/>
+          </a:solidFill>
+          <a:ln w="12700">
+            <a:solidFill>
+              <a:srgbClr val="10A37F"/>
+            </a:solidFill>
+            <a:prstDash val="solid"/>
+          </a:ln>
+        </p:spPr>
+      </p:sp>
+      <p:sp>
+        <p:nvSpPr>
+          <p:cNvPr id="8" name="Text 6"/>
+          <p:cNvSpPr/>
+          <p:nvPr/>
+        </p:nvSpPr>
+        <p:spPr>
+          <a:xfrm>
+            <a:off x="548640" y="4663440"/>
+            <a:ext cx="11094415" cy="1280160"/>
+          </a:xfrm>
+          <a:prstGeom prst="rect">
+            <a:avLst/>
+          </a:prstGeom>
+          <a:noFill/>
+          <a:ln/>
+        </p:spPr>
+        <p:txBody>
+          <a:bodyPr wrap="square" rtlCol="0" anchor="t"/>
+          <a:lstStyle/>
+          <a:p>
+            <a:pPr indent="0" marL="0">
+              <a:buNone/>
+            </a:pPr>
+            <a:r>
+              <a:rPr lang="en-US" sz="1700" dirty="0">
+                <a:solidFill>
+                  <a:srgbClr val="6E7990"/>
+                </a:solidFill>
+                <a:latin typeface="Calibri" pitchFamily="34" charset="0"/>
+                <a:ea typeface="Calibri" pitchFamily="34" charset="-122"/>
+                <a:cs typeface="Calibri" pitchFamily="34" charset="-120"/>
+              </a:rPr>
+              <a:t>Persaingan tidak lagi soal siapa yang punya data terbesar — tapi siapa yang dapat membaca, menafsirkan, dan bertindak atasnya tercepat.</a:t>
+            </a:r>
+            <a:endParaRPr lang="en-US" sz="1700" dirty="0"/>
+          </a:p>
+        </p:txBody>
+      </p:sp>
+      <p:sp>
+        <p:nvSpPr>
+          <p:cNvPr id="9" name="Shape 7"/>
+          <p:cNvSpPr/>
+          <p:nvPr/>
+        </p:nvSpPr>
+        <p:spPr>
+          <a:xfrm>
+            <a:off x="0" y="0"/>
+            <a:ext cx="12191695" cy="73152"/>
+          </a:xfrm>
+          <a:prstGeom prst="rect">
+            <a:avLst/>
+          </a:prstGeom>
+          <a:solidFill>
+            <a:srgbClr val="2563EB"/>
+          </a:solidFill>
+          <a:ln w="12700">
+            <a:solidFill>
+              <a:srgbClr val="2563EB"/>
+            </a:solidFill>
+            <a:prstDash val="solid"/>
+          </a:ln>
+        </p:spPr>
+      </p:sp>
+      <p:pic>
+        <p:nvPicPr>
+          <p:cNvPr id="10" name="Image 0" descr="/Users/muhammadrayandika/repo/document-agent/brand/logo.png">    </p:cNvPr>
+          <p:cNvPicPr>
+            <a:picLocks noChangeAspect="1"/>
+          </p:cNvPicPr>
+          <p:nvPr/>
+        </p:nvPicPr>
+        <p:blipFill>
+          <a:blip r:embed="rId1"/>
+          <a:stretch>
+            <a:fillRect/>
+          </a:stretch>
+        </p:blipFill>
+        <p:spPr>
+          <a:xfrm>
+            <a:off x="502920" y="274320"/>
+            <a:ext cx="411480" cy="411480"/>
+          </a:xfrm>
+          <a:prstGeom prst="rect">
+            <a:avLst/>
+          </a:prstGeom>
+        </p:spPr>
+      </p:pic>
+      <p:sp>
+        <p:nvSpPr>
+          <p:cNvPr id="11" name="Text 8"/>
+          <p:cNvSpPr/>
+          <p:nvPr/>
+        </p:nvSpPr>
+        <p:spPr>
+          <a:xfrm>
+            <a:off x="960120" y="292608"/>
+            <a:ext cx="2743200" cy="365760"/>
+          </a:xfrm>
+          <a:prstGeom prst="rect">
+            <a:avLst/>
+          </a:prstGeom>
+          <a:noFill/>
+          <a:ln/>
+        </p:spPr>
+        <p:txBody>
+          <a:bodyPr wrap="square" rtlCol="0" anchor="ctr"/>
+          <a:lstStyle/>
+          <a:p>
+            <a:pPr indent="0" marL="0">
+              <a:buNone/>
+            </a:pPr>
+            <a:r>
+              <a:rPr lang="en-US" sz="1200" b="1" dirty="0">
+                <a:solidFill>
+                  <a:srgbClr val="141B2E"/>
+                </a:solidFill>
+                <a:latin typeface="Calibri" pitchFamily="34" charset="0"/>
+                <a:ea typeface="Calibri" pitchFamily="34" charset="-122"/>
+                <a:cs typeface="Calibri" pitchFamily="34" charset="-120"/>
+              </a:rPr>
+              <a:t>OpenCraft</a:t>
+            </a:r>
+            <a:endParaRPr lang="en-US" sz="1200" dirty="0"/>
+          </a:p>
+        </p:txBody>
+      </p:sp>
+      <p:sp>
+        <p:nvSpPr>
+          <p:cNvPr id="12" name="Text 9"/>
+          <p:cNvSpPr/>
+          <p:nvPr/>
+        </p:nvSpPr>
+        <p:spPr>
+          <a:xfrm>
+            <a:off x="10820095" y="292608"/>
+            <a:ext cx="914400" cy="365760"/>
+          </a:xfrm>
+          <a:prstGeom prst="rect">
+            <a:avLst/>
+          </a:prstGeom>
+          <a:noFill/>
+          <a:ln/>
+        </p:spPr>
+        <p:txBody>
+          <a:bodyPr wrap="square" rtlCol="0" anchor="ctr"/>
+          <a:lstStyle/>
+          <a:p>
+            <a:pPr algn="r" indent="0" marL="0">
+              <a:buNone/>
+            </a:pPr>
+            <a:r>
+              <a:rPr lang="en-US" sz="1000" dirty="0">
+                <a:solidFill>
+                  <a:srgbClr val="B7BFCC"/>
+                </a:solidFill>
+                <a:latin typeface="Calibri" pitchFamily="34" charset="0"/>
+                <a:ea typeface="Calibri" pitchFamily="34" charset="-122"/>
+                <a:cs typeface="Calibri" pitchFamily="34" charset="-120"/>
+              </a:rPr>
+              <a:t>02 / 05</a:t>
+            </a:r>
+            <a:endParaRPr lang="en-US" sz="1000" dirty="0"/>
+          </a:p>
+        </p:txBody>
+      </p:sp>
+      <p:sp>
+        <p:nvSpPr>
+          <p:cNvPr id="13" name="Text 10"/>
+          <p:cNvSpPr/>
+          <p:nvPr/>
+        </p:nvSpPr>
+        <p:spPr>
+          <a:xfrm>
+            <a:off x="548640" y="6446520"/>
+            <a:ext cx="11094415" cy="274320"/>
+          </a:xfrm>
+          <a:prstGeom prst="rect">
+            <a:avLst/>
+          </a:prstGeom>
+          <a:noFill/>
+          <a:ln/>
+        </p:spPr>
+        <p:txBody>
+          <a:bodyPr wrap="square" rtlCol="0" anchor="ctr"/>
+          <a:lstStyle/>
+          <a:p>
+            <a:pPr indent="0" marL="0">
+              <a:buNone/>
+            </a:pPr>
+            <a:r>
+              <a:rPr lang="en-US" sz="800" spc="200" kern="0" dirty="0">
+                <a:solidFill>
+                  <a:srgbClr val="B7BFCC"/>
+                </a:solidFill>
+                <a:latin typeface="Calibri" pitchFamily="34" charset="0"/>
+                <a:ea typeface="Calibri" pitchFamily="34" charset="-122"/>
+                <a:cs typeface="Calibri" pitchFamily="34" charset="-120"/>
+              </a:rPr>
+              <a:t>OpenCraft · AI Transformation Company</a:t>
+            </a:r>
+            <a:endParaRPr lang="en-US" sz="800" dirty="0"/>
+          </a:p>
+        </p:txBody>
+      </p:sp>
+    </p:spTree>
+  </p:cSld>
+  <p:clrMapOvr>
+    <a:masterClrMapping/>
+  </p:clrMapOvr>
+</p:sld>
+</file>
+
+<file path=ppt/slides/slide3.xml><?xml version="1.0" encoding="utf-8"?>
+<p:sld xmlns:a="http://schemas.openxmlformats.org/drawingml/2006/main" xmlns:r="http://schemas.openxmlformats.org/officeDocument/2006/relationships" xmlns:p="http://schemas.openxmlformats.org/presentationml/2006/main">
+  <p:cSld name="Slide 3">
+    <p:bg>
+      <p:bgPr>
+        <a:solidFill>
+          <a:srgbClr val="FFFFFF"/>
+        </a:solidFill>
+      </p:bgPr>
+    </p:bg>
+    <p:spTree>
+      <p:nvGrpSpPr>
+        <p:cNvPr id="1" name=""/>
+        <p:cNvGrpSpPr/>
+        <p:nvPr/>
+      </p:nvGrpSpPr>
+      <p:grpSpPr>
+        <a:xfrm>
+          <a:off x="0" y="0"/>
+          <a:ext cx="0" cy="0"/>
+          <a:chOff x="0" y="0"/>
+          <a:chExt cx="0" cy="0"/>
+        </a:xfrm>
+      </p:grpSpPr>
+      <p:sp>
+        <p:nvSpPr>
+          <p:cNvPr id="2" name="Text 0"/>
+          <p:cNvSpPr/>
+          <p:nvPr/>
+        </p:nvSpPr>
+        <p:spPr>
+          <a:xfrm>
+            <a:off x="548640" y="914400"/>
+            <a:ext cx="11094415" cy="640080"/>
+          </a:xfrm>
+          <a:prstGeom prst="rect">
+            <a:avLst/>
+          </a:prstGeom>
+          <a:noFill/>
+          <a:ln/>
+        </p:spPr>
+        <p:txBody>
+          <a:bodyPr wrap="square" rtlCol="0" anchor="ctr"/>
+          <a:lstStyle/>
+          <a:p>
+            <a:pPr indent="0" marL="0">
+              <a:buNone/>
+            </a:pPr>
+            <a:r>
+              <a:rPr lang="en-US" sz="3000" b="1" dirty="0">
+                <a:solidFill>
+                  <a:srgbClr val="141B2E"/>
+                </a:solidFill>
+                <a:latin typeface="Calibri" pitchFamily="34" charset="0"/>
+                <a:ea typeface="Calibri" pitchFamily="34" charset="-122"/>
+                <a:cs typeface="Calibri" pitchFamily="34" charset="-120"/>
+              </a:rPr>
+              <a:t>Tiga pilar transformasi AI OpenCraft</a:t>
+            </a:r>
+            <a:endParaRPr lang="en-US" sz="3000" dirty="0"/>
+          </a:p>
+        </p:txBody>
+      </p:sp>
+      <p:sp>
+        <p:nvSpPr>
+          <p:cNvPr id="3" name="Text 1"/>
+          <p:cNvSpPr/>
+          <p:nvPr/>
+        </p:nvSpPr>
+        <p:spPr>
+          <a:xfrm>
+            <a:off x="548640" y="1645920"/>
+            <a:ext cx="11094415" cy="457200"/>
+          </a:xfrm>
+          <a:prstGeom prst="rect">
+            <a:avLst/>
+          </a:prstGeom>
+          <a:noFill/>
+          <a:ln/>
+        </p:spPr>
+        <p:txBody>
+          <a:bodyPr wrap="square" rtlCol="0" anchor="ctr"/>
+          <a:lstStyle/>
+          <a:p>
+            <a:pPr indent="0" marL="0">
+              <a:buNone/>
+            </a:pPr>
+            <a:r>
+              <a:rPr lang="en-US" sz="1400" dirty="0">
+                <a:solidFill>
+                  <a:srgbClr val="6E7990"/>
+                </a:solidFill>
+                <a:latin typeface="Calibri" pitchFamily="34" charset="0"/>
+                <a:ea typeface="Calibri" pitchFamily="34" charset="-122"/>
+                <a:cs typeface="Calibri" pitchFamily="34" charset="-120"/>
+              </a:rPr>
+              <a:t>Mulai dari strategi, eksekusi, hingga adopsi — sebagai satu sistem.</a:t>
+            </a:r>
+            <a:endParaRPr lang="en-US" sz="1400" dirty="0"/>
+          </a:p>
+        </p:txBody>
+      </p:sp>
+      <p:sp>
+        <p:nvSpPr>
+          <p:cNvPr id="4" name="Shape 2"/>
+          <p:cNvSpPr/>
+          <p:nvPr/>
+        </p:nvSpPr>
+        <p:spPr>
+          <a:xfrm>
+            <a:off x="2291029" y="2743200"/>
+            <a:ext cx="7609637" cy="0"/>
+          </a:xfrm>
+          <a:prstGeom prst="line">
+            <a:avLst/>
+          </a:prstGeom>
+          <a:noFill/>
+          <a:ln w="19050">
+            <a:solidFill>
+              <a:srgbClr val="E2E6EE"/>
+            </a:solidFill>
+            <a:prstDash val="dash"/>
+          </a:ln>
+        </p:spPr>
+      </p:sp>
+      <p:sp>
+        <p:nvSpPr>
+          <p:cNvPr id="5" name="Shape 3"/>
+          <p:cNvSpPr/>
+          <p:nvPr/>
+        </p:nvSpPr>
+        <p:spPr>
+          <a:xfrm>
+            <a:off x="548640" y="2743200"/>
+            <a:ext cx="3484778" cy="3200400"/>
+          </a:xfrm>
+          <a:prstGeom prst="rect">
+            <a:avLst/>
+          </a:prstGeom>
+          <a:solidFill>
+            <a:srgbClr val="FFFFFF"/>
+          </a:solidFill>
+          <a:ln w="9525">
+            <a:solidFill>
+              <a:srgbClr val="E2E6EE"/>
+            </a:solidFill>
+            <a:prstDash val="solid"/>
+          </a:ln>
+        </p:spPr>
+      </p:sp>
+      <p:sp>
+        <p:nvSpPr>
+          <p:cNvPr id="6" name="Shape 4"/>
+          <p:cNvSpPr/>
+          <p:nvPr/>
+        </p:nvSpPr>
+        <p:spPr>
+          <a:xfrm>
+            <a:off x="548640" y="2743200"/>
+            <a:ext cx="91440" cy="3200400"/>
+          </a:xfrm>
+          <a:prstGeom prst="rect">
+            <a:avLst/>
+          </a:prstGeom>
+          <a:solidFill>
+            <a:srgbClr val="2563EB"/>
+          </a:solidFill>
+          <a:ln w="12700">
+            <a:solidFill>
+              <a:srgbClr val="2563EB"/>
+            </a:solidFill>
+            <a:prstDash val="solid"/>
+          </a:ln>
+        </p:spPr>
+      </p:sp>
+      <p:sp>
+        <p:nvSpPr>
+          <p:cNvPr id="7" name="Shape 5"/>
+          <p:cNvSpPr/>
+          <p:nvPr/>
+        </p:nvSpPr>
+        <p:spPr>
+          <a:xfrm>
+            <a:off x="1769821" y="2221992"/>
+            <a:ext cx="1042416" cy="1042416"/>
+          </a:xfrm>
+          <a:prstGeom prst="ellipse">
+            <a:avLst/>
+          </a:prstGeom>
+          <a:solidFill>
+            <a:srgbClr val="2563EB">
+              <a:alpha val="20000"/>
+            </a:srgbClr>
+          </a:solidFill>
+          <a:ln w="12700">
+            <a:solidFill>
+              <a:srgbClr val="2563EB">
+                <a:alpha val="20000"/>
+              </a:srgbClr>
+            </a:solidFill>
+            <a:prstDash val="solid"/>
+          </a:ln>
+        </p:spPr>
+      </p:sp>
+      <p:sp>
+        <p:nvSpPr>
+          <p:cNvPr id="8" name="Shape 6"/>
+          <p:cNvSpPr/>
+          <p:nvPr/>
+        </p:nvSpPr>
+        <p:spPr>
+          <a:xfrm>
+            <a:off x="1879549" y="2331720"/>
+            <a:ext cx="822960" cy="822960"/>
+          </a:xfrm>
+          <a:prstGeom prst="ellipse">
+            <a:avLst/>
+          </a:prstGeom>
+          <a:solidFill>
+            <a:srgbClr val="2563EB"/>
+          </a:solidFill>
+          <a:ln w="12700">
+            <a:solidFill>
+              <a:srgbClr val="2563EB"/>
+            </a:solidFill>
+            <a:prstDash val="solid"/>
+          </a:ln>
+        </p:spPr>
+      </p:sp>
+      <p:sp>
+        <p:nvSpPr>
+          <p:cNvPr id="9" name="Text 7"/>
+          <p:cNvSpPr/>
+          <p:nvPr/>
+        </p:nvSpPr>
+        <p:spPr>
+          <a:xfrm>
+            <a:off x="1879549" y="2350008"/>
+            <a:ext cx="822960" cy="822960"/>
+          </a:xfrm>
+          <a:prstGeom prst="rect">
+            <a:avLst/>
+          </a:prstGeom>
+          <a:noFill/>
+          <a:ln/>
+        </p:spPr>
+        <p:txBody>
+          <a:bodyPr wrap="square" rtlCol="0" anchor="ctr"/>
+          <a:lstStyle/>
+          <a:p>
+            <a:pPr algn="ctr" indent="0" marL="0">
+              <a:buNone/>
+            </a:pPr>
+            <a:r>
+              <a:rPr lang="en-US" sz="2400" b="1" dirty="0">
+                <a:solidFill>
+                  <a:srgbClr val="FFFFFF"/>
+                </a:solidFill>
+                <a:latin typeface="Calibri" pitchFamily="34" charset="0"/>
+                <a:ea typeface="Calibri" pitchFamily="34" charset="-122"/>
+                <a:cs typeface="Calibri" pitchFamily="34" charset="-120"/>
+              </a:rPr>
+              <a:t>01</a:t>
+            </a:r>
+            <a:endParaRPr lang="en-US" sz="2400" dirty="0"/>
+          </a:p>
+        </p:txBody>
+      </p:sp>
+      <p:sp>
+        <p:nvSpPr>
+          <p:cNvPr id="10" name="Text 8"/>
+          <p:cNvSpPr/>
+          <p:nvPr/>
+        </p:nvSpPr>
+        <p:spPr>
+          <a:xfrm>
+            <a:off x="914400" y="3520440"/>
+            <a:ext cx="2753258" cy="822960"/>
+          </a:xfrm>
+          <a:prstGeom prst="rect">
+            <a:avLst/>
+          </a:prstGeom>
+          <a:noFill/>
+          <a:ln/>
+        </p:spPr>
+        <p:txBody>
+          <a:bodyPr wrap="square" rtlCol="0" anchor="t"/>
+          <a:lstStyle/>
+          <a:p>
+            <a:pPr algn="ctr" indent="0" marL="0">
+              <a:buNone/>
+            </a:pPr>
+            <a:r>
+              <a:rPr lang="en-US" sz="1800" b="1" dirty="0">
+                <a:solidFill>
+                  <a:srgbClr val="141B2E"/>
+                </a:solidFill>
+                <a:latin typeface="Calibri" pitchFamily="34" charset="0"/>
+                <a:ea typeface="Calibri" pitchFamily="34" charset="-122"/>
+                <a:cs typeface="Calibri" pitchFamily="34" charset="-120"/>
+              </a:rPr>
+              <a:t>AI Strategy</a:t>
+            </a:r>
+            <a:endParaRPr lang="en-US" sz="1800" dirty="0"/>
+          </a:p>
+        </p:txBody>
+      </p:sp>
+      <p:sp>
+        <p:nvSpPr>
+          <p:cNvPr id="11" name="Shape 9"/>
+          <p:cNvSpPr/>
+          <p:nvPr/>
+        </p:nvSpPr>
+        <p:spPr>
+          <a:xfrm>
+            <a:off x="2016709" y="4343400"/>
+            <a:ext cx="548640" cy="0"/>
+          </a:xfrm>
+          <a:prstGeom prst="line">
+            <a:avLst/>
+          </a:prstGeom>
+          <a:noFill/>
+          <a:ln w="19050">
+            <a:solidFill>
+              <a:srgbClr val="2563EB"/>
+            </a:solidFill>
+            <a:prstDash val="solid"/>
+          </a:ln>
+        </p:spPr>
+      </p:sp>
+      <p:sp>
+        <p:nvSpPr>
+          <p:cNvPr id="12" name="Text 10"/>
+          <p:cNvSpPr/>
+          <p:nvPr/>
+        </p:nvSpPr>
+        <p:spPr>
+          <a:xfrm>
+            <a:off x="914400" y="4480560"/>
+            <a:ext cx="2753258" cy="1463040"/>
+          </a:xfrm>
+          <a:prstGeom prst="rect">
+            <a:avLst/>
+          </a:prstGeom>
+          <a:noFill/>
+          <a:ln/>
+        </p:spPr>
+        <p:txBody>
+          <a:bodyPr wrap="square" rtlCol="0" anchor="t"/>
+          <a:lstStyle/>
+          <a:p>
+            <a:pPr algn="ctr" indent="0" marL="0">
+              <a:buNone/>
+            </a:pPr>
+            <a:r>
+              <a:rPr lang="en-US" sz="1200" dirty="0">
+                <a:solidFill>
+                  <a:srgbClr val="6E7990"/>
+                </a:solidFill>
+                <a:latin typeface="Calibri" pitchFamily="34" charset="0"/>
+                <a:ea typeface="Calibri" pitchFamily="34" charset="-122"/>
+                <a:cs typeface="Calibri" pitchFamily="34" charset="-120"/>
+              </a:rPr>
+              <a:t>Roadmap dan prioritization dari business value, bukan dari hype.</a:t>
+            </a:r>
+            <a:endParaRPr lang="en-US" sz="1200" dirty="0"/>
+          </a:p>
+        </p:txBody>
+      </p:sp>
+      <p:sp>
+        <p:nvSpPr>
+          <p:cNvPr id="13" name="Shape 11"/>
+          <p:cNvSpPr/>
+          <p:nvPr/>
+        </p:nvSpPr>
+        <p:spPr>
+          <a:xfrm>
+            <a:off x="4353458" y="2743200"/>
+            <a:ext cx="3484778" cy="3200400"/>
+          </a:xfrm>
+          <a:prstGeom prst="rect">
+            <a:avLst/>
+          </a:prstGeom>
+          <a:solidFill>
+            <a:srgbClr val="FFFFFF"/>
+          </a:solidFill>
+          <a:ln w="9525">
+            <a:solidFill>
+              <a:srgbClr val="E2E6EE"/>
+            </a:solidFill>
+            <a:prstDash val="solid"/>
+          </a:ln>
+        </p:spPr>
+      </p:sp>
+      <p:sp>
+        <p:nvSpPr>
+          <p:cNvPr id="14" name="Shape 12"/>
+          <p:cNvSpPr/>
+          <p:nvPr/>
+        </p:nvSpPr>
+        <p:spPr>
+          <a:xfrm>
+            <a:off x="4353458" y="2743200"/>
+            <a:ext cx="91440" cy="3200400"/>
+          </a:xfrm>
+          <a:prstGeom prst="rect">
+            <a:avLst/>
+          </a:prstGeom>
+          <a:solidFill>
+            <a:srgbClr val="10A37F"/>
+          </a:solidFill>
+          <a:ln w="12700">
+            <a:solidFill>
+              <a:srgbClr val="10A37F"/>
+            </a:solidFill>
+            <a:prstDash val="solid"/>
+          </a:ln>
+        </p:spPr>
+      </p:sp>
+      <p:sp>
+        <p:nvSpPr>
+          <p:cNvPr id="15" name="Shape 13"/>
+          <p:cNvSpPr/>
+          <p:nvPr/>
+        </p:nvSpPr>
+        <p:spPr>
+          <a:xfrm>
+            <a:off x="5574640" y="2221992"/>
+            <a:ext cx="1042416" cy="1042416"/>
+          </a:xfrm>
+          <a:prstGeom prst="ellipse">
+            <a:avLst/>
+          </a:prstGeom>
+          <a:solidFill>
+            <a:srgbClr val="10A37F">
+              <a:alpha val="20000"/>
+            </a:srgbClr>
+          </a:solidFill>
+          <a:ln w="12700">
+            <a:solidFill>
+              <a:srgbClr val="10A37F">
+                <a:alpha val="20000"/>
+              </a:srgbClr>
+            </a:solidFill>
+            <a:prstDash val="solid"/>
+          </a:ln>
+        </p:spPr>
+      </p:sp>
+      <p:sp>
+        <p:nvSpPr>
+          <p:cNvPr id="16" name="Shape 14"/>
+          <p:cNvSpPr/>
+          <p:nvPr/>
+        </p:nvSpPr>
+        <p:spPr>
+          <a:xfrm>
+            <a:off x="5684368" y="2331720"/>
+            <a:ext cx="822960" cy="822960"/>
+          </a:xfrm>
+          <a:prstGeom prst="ellipse">
+            <a:avLst/>
+          </a:prstGeom>
+          <a:solidFill>
+            <a:srgbClr val="10A37F"/>
+          </a:solidFill>
+          <a:ln w="12700">
+            <a:solidFill>
+              <a:srgbClr val="10A37F"/>
+            </a:solidFill>
+            <a:prstDash val="solid"/>
+          </a:ln>
+        </p:spPr>
+      </p:sp>
+      <p:sp>
+        <p:nvSpPr>
+          <p:cNvPr id="17" name="Text 15"/>
+          <p:cNvSpPr/>
+          <p:nvPr/>
+        </p:nvSpPr>
+        <p:spPr>
+          <a:xfrm>
+            <a:off x="5684368" y="2350008"/>
+            <a:ext cx="822960" cy="822960"/>
+          </a:xfrm>
+          <a:prstGeom prst="rect">
+            <a:avLst/>
+          </a:prstGeom>
+          <a:noFill/>
+          <a:ln/>
+        </p:spPr>
+        <p:txBody>
+          <a:bodyPr wrap="square" rtlCol="0" anchor="ctr"/>
+          <a:lstStyle/>
+          <a:p>
+            <a:pPr algn="ctr" indent="0" marL="0">
+              <a:buNone/>
+            </a:pPr>
+            <a:r>
+              <a:rPr lang="en-US" sz="2400" b="1" dirty="0">
+                <a:solidFill>
+                  <a:srgbClr val="FFFFFF"/>
+                </a:solidFill>
+                <a:latin typeface="Calibri" pitchFamily="34" charset="0"/>
+                <a:ea typeface="Calibri" pitchFamily="34" charset="-122"/>
+                <a:cs typeface="Calibri" pitchFamily="34" charset="-120"/>
+              </a:rPr>
+              <a:t>02</a:t>
+            </a:r>
+            <a:endParaRPr lang="en-US" sz="2400" dirty="0"/>
+          </a:p>
+        </p:txBody>
+      </p:sp>
+      <p:sp>
+        <p:nvSpPr>
+          <p:cNvPr id="18" name="Text 16"/>
+          <p:cNvSpPr/>
+          <p:nvPr/>
+        </p:nvSpPr>
+        <p:spPr>
+          <a:xfrm>
+            <a:off x="4719218" y="3520440"/>
+            <a:ext cx="2753258" cy="822960"/>
+          </a:xfrm>
+          <a:prstGeom prst="rect">
+            <a:avLst/>
+          </a:prstGeom>
+          <a:noFill/>
+          <a:ln/>
+        </p:spPr>
+        <p:txBody>
+          <a:bodyPr wrap="square" rtlCol="0" anchor="t"/>
+          <a:lstStyle/>
+          <a:p>
+            <a:pPr algn="ctr" indent="0" marL="0">
+              <a:buNone/>
+            </a:pPr>
+            <a:r>
+              <a:rPr lang="en-US" sz="1800" b="1" dirty="0">
+                <a:solidFill>
+                  <a:srgbClr val="141B2E"/>
+                </a:solidFill>
+                <a:latin typeface="Calibri" pitchFamily="34" charset="0"/>
+                <a:ea typeface="Calibri" pitchFamily="34" charset="-122"/>
+                <a:cs typeface="Calibri" pitchFamily="34" charset="-120"/>
+              </a:rPr>
+              <a:t>Custom AI Build</a:t>
+            </a:r>
+            <a:endParaRPr lang="en-US" sz="1800" dirty="0"/>
+          </a:p>
+        </p:txBody>
+      </p:sp>
+      <p:sp>
+        <p:nvSpPr>
+          <p:cNvPr id="19" name="Shape 17"/>
+          <p:cNvSpPr/>
+          <p:nvPr/>
+        </p:nvSpPr>
+        <p:spPr>
+          <a:xfrm>
+            <a:off x="5821528" y="4343400"/>
+            <a:ext cx="548640" cy="0"/>
+          </a:xfrm>
+          <a:prstGeom prst="line">
+            <a:avLst/>
+          </a:prstGeom>
+          <a:noFill/>
+          <a:ln w="19050">
+            <a:solidFill>
+              <a:srgbClr val="10A37F"/>
+            </a:solidFill>
+            <a:prstDash val="solid"/>
+          </a:ln>
+        </p:spPr>
+      </p:sp>
+      <p:sp>
+        <p:nvSpPr>
+          <p:cNvPr id="20" name="Text 18"/>
+          <p:cNvSpPr/>
+          <p:nvPr/>
+        </p:nvSpPr>
+        <p:spPr>
+          <a:xfrm>
+            <a:off x="4719218" y="4480560"/>
+            <a:ext cx="2753258" cy="1463040"/>
+          </a:xfrm>
+          <a:prstGeom prst="rect">
+            <a:avLst/>
+          </a:prstGeom>
+          <a:noFill/>
+          <a:ln/>
+        </p:spPr>
+        <p:txBody>
+          <a:bodyPr wrap="square" rtlCol="0" anchor="t"/>
+          <a:lstStyle/>
+          <a:p>
+            <a:pPr algn="ctr" indent="0" marL="0">
+              <a:buNone/>
+            </a:pPr>
+            <a:r>
+              <a:rPr lang="en-US" sz="1200" dirty="0">
+                <a:solidFill>
+                  <a:srgbClr val="6E7990"/>
+                </a:solidFill>
+                <a:latin typeface="Calibri" pitchFamily="34" charset="0"/>
+                <a:ea typeface="Calibri" pitchFamily="34" charset="-122"/>
+                <a:cs typeface="Calibri" pitchFamily="34" charset="-120"/>
+              </a:rPr>
+              <a:t>Custom LLM, agent, RAG — dirancang untuk workflow Anda.</a:t>
+            </a:r>
+            <a:endParaRPr lang="en-US" sz="1200" dirty="0"/>
+          </a:p>
+        </p:txBody>
+      </p:sp>
+      <p:sp>
+        <p:nvSpPr>
+          <p:cNvPr id="21" name="Shape 19"/>
+          <p:cNvSpPr/>
+          <p:nvPr/>
+        </p:nvSpPr>
+        <p:spPr>
+          <a:xfrm>
+            <a:off x="8158277" y="2743200"/>
+            <a:ext cx="3484778" cy="3200400"/>
+          </a:xfrm>
+          <a:prstGeom prst="rect">
+            <a:avLst/>
+          </a:prstGeom>
+          <a:solidFill>
+            <a:srgbClr val="FFFFFF"/>
+          </a:solidFill>
+          <a:ln w="9525">
+            <a:solidFill>
+              <a:srgbClr val="E2E6EE"/>
+            </a:solidFill>
+            <a:prstDash val="solid"/>
+          </a:ln>
+        </p:spPr>
+      </p:sp>
+      <p:sp>
+        <p:nvSpPr>
+          <p:cNvPr id="22" name="Shape 20"/>
+          <p:cNvSpPr/>
+          <p:nvPr/>
+        </p:nvSpPr>
+        <p:spPr>
+          <a:xfrm>
+            <a:off x="8158277" y="2743200"/>
+            <a:ext cx="91440" cy="3200400"/>
+          </a:xfrm>
+          <a:prstGeom prst="rect">
+            <a:avLst/>
+          </a:prstGeom>
+          <a:solidFill>
+            <a:srgbClr val="23304A"/>
+          </a:solidFill>
+          <a:ln w="12700">
+            <a:solidFill>
+              <a:srgbClr val="23304A"/>
+            </a:solidFill>
+            <a:prstDash val="solid"/>
+          </a:ln>
+        </p:spPr>
+      </p:sp>
+      <p:sp>
+        <p:nvSpPr>
+          <p:cNvPr id="23" name="Shape 21"/>
+          <p:cNvSpPr/>
+          <p:nvPr/>
+        </p:nvSpPr>
+        <p:spPr>
+          <a:xfrm>
+            <a:off x="9379458" y="2221992"/>
+            <a:ext cx="1042416" cy="1042416"/>
+          </a:xfrm>
+          <a:prstGeom prst="ellipse">
+            <a:avLst/>
+          </a:prstGeom>
+          <a:solidFill>
+            <a:srgbClr val="23304A">
+              <a:alpha val="20000"/>
+            </a:srgbClr>
+          </a:solidFill>
+          <a:ln w="12700">
+            <a:solidFill>
+              <a:srgbClr val="23304A">
+                <a:alpha val="20000"/>
+              </a:srgbClr>
+            </a:solidFill>
+            <a:prstDash val="solid"/>
+          </a:ln>
+        </p:spPr>
+      </p:sp>
+      <p:sp>
+        <p:nvSpPr>
+          <p:cNvPr id="24" name="Shape 22"/>
+          <p:cNvSpPr/>
+          <p:nvPr/>
+        </p:nvSpPr>
+        <p:spPr>
+          <a:xfrm>
+            <a:off x="9489186" y="2331720"/>
+            <a:ext cx="822960" cy="822960"/>
+          </a:xfrm>
+          <a:prstGeom prst="ellipse">
+            <a:avLst/>
+          </a:prstGeom>
+          <a:solidFill>
+            <a:srgbClr val="23304A"/>
+          </a:solidFill>
+          <a:ln w="12700">
+            <a:solidFill>
+              <a:srgbClr val="23304A"/>
+            </a:solidFill>
+            <a:prstDash val="solid"/>
+          </a:ln>
+        </p:spPr>
+      </p:sp>
+      <p:sp>
+        <p:nvSpPr>
+          <p:cNvPr id="25" name="Text 23"/>
+          <p:cNvSpPr/>
+          <p:nvPr/>
+        </p:nvSpPr>
+        <p:spPr>
+          <a:xfrm>
+            <a:off x="9489186" y="2350008"/>
+            <a:ext cx="822960" cy="822960"/>
+          </a:xfrm>
+          <a:prstGeom prst="rect">
+            <a:avLst/>
+          </a:prstGeom>
+          <a:noFill/>
+          <a:ln/>
+        </p:spPr>
+        <p:txBody>
+          <a:bodyPr wrap="square" rtlCol="0" anchor="ctr"/>
+          <a:lstStyle/>
+          <a:p>
+            <a:pPr algn="ctr" indent="0" marL="0">
+              <a:buNone/>
+            </a:pPr>
+            <a:r>
+              <a:rPr lang="en-US" sz="2400" b="1" dirty="0">
+                <a:solidFill>
+                  <a:srgbClr val="FFFFFF"/>
+                </a:solidFill>
+                <a:latin typeface="Calibri" pitchFamily="34" charset="0"/>
+                <a:ea typeface="Calibri" pitchFamily="34" charset="-122"/>
+                <a:cs typeface="Calibri" pitchFamily="34" charset="-120"/>
+              </a:rPr>
+              <a:t>03</a:t>
+            </a:r>
+            <a:endParaRPr lang="en-US" sz="2400" dirty="0"/>
+          </a:p>
+        </p:txBody>
+      </p:sp>
+      <p:sp>
+        <p:nvSpPr>
+          <p:cNvPr id="26" name="Text 24"/>
+          <p:cNvSpPr/>
+          <p:nvPr/>
+        </p:nvSpPr>
+        <p:spPr>
+          <a:xfrm>
+            <a:off x="8524037" y="3520440"/>
+            <a:ext cx="2753258" cy="822960"/>
+          </a:xfrm>
+          <a:prstGeom prst="rect">
+            <a:avLst/>
+          </a:prstGeom>
+          <a:noFill/>
+          <a:ln/>
+        </p:spPr>
+        <p:txBody>
+          <a:bodyPr wrap="square" rtlCol="0" anchor="t"/>
+          <a:lstStyle/>
+          <a:p>
+            <a:pPr algn="ctr" indent="0" marL="0">
+              <a:buNone/>
+            </a:pPr>
+            <a:r>
+              <a:rPr lang="en-US" sz="1800" b="1" dirty="0">
+                <a:solidFill>
+                  <a:srgbClr val="141B2E"/>
+                </a:solidFill>
+                <a:latin typeface="Calibri" pitchFamily="34" charset="0"/>
+                <a:ea typeface="Calibri" pitchFamily="34" charset="-122"/>
+                <a:cs typeface="Calibri" pitchFamily="34" charset="-120"/>
+              </a:rPr>
+              <a:t>Enablement</a:t>
+            </a:r>
+            <a:endParaRPr lang="en-US" sz="1800" dirty="0"/>
+          </a:p>
+        </p:txBody>
+      </p:sp>
+      <p:sp>
+        <p:nvSpPr>
+          <p:cNvPr id="27" name="Shape 25"/>
+          <p:cNvSpPr/>
+          <p:nvPr/>
+        </p:nvSpPr>
+        <p:spPr>
+          <a:xfrm>
+            <a:off x="9626346" y="4343400"/>
+            <a:ext cx="548640" cy="0"/>
+          </a:xfrm>
+          <a:prstGeom prst="line">
+            <a:avLst/>
+          </a:prstGeom>
+          <a:noFill/>
+          <a:ln w="19050">
+            <a:solidFill>
+              <a:srgbClr val="23304A"/>
+            </a:solidFill>
+            <a:prstDash val="solid"/>
+          </a:ln>
+        </p:spPr>
+      </p:sp>
+      <p:sp>
+        <p:nvSpPr>
+          <p:cNvPr id="28" name="Text 26"/>
+          <p:cNvSpPr/>
+          <p:nvPr/>
+        </p:nvSpPr>
+        <p:spPr>
+          <a:xfrm>
+            <a:off x="8524037" y="4480560"/>
+            <a:ext cx="2753258" cy="1463040"/>
+          </a:xfrm>
+          <a:prstGeom prst="rect">
+            <a:avLst/>
+          </a:prstGeom>
+          <a:noFill/>
+          <a:ln/>
+        </p:spPr>
+        <p:txBody>
+          <a:bodyPr wrap="square" rtlCol="0" anchor="t"/>
+          <a:lstStyle/>
+          <a:p>
+            <a:pPr algn="ctr" indent="0" marL="0">
+              <a:buNone/>
+            </a:pPr>
+            <a:r>
+              <a:rPr lang="en-US" sz="1200" dirty="0">
+                <a:solidFill>
+                  <a:srgbClr val="6E7990"/>
+                </a:solidFill>
+                <a:latin typeface="Calibri" pitchFamily="34" charset="0"/>
+                <a:ea typeface="Calibri" pitchFamily="34" charset="-122"/>
+                <a:cs typeface="Calibri" pitchFamily="34" charset="-120"/>
+              </a:rPr>
+              <a:t>Tim internal Anda jadi mandiri — bukan ketergantungan vendor.</a:t>
+            </a:r>
+            <a:endParaRPr lang="en-US" sz="1200" dirty="0"/>
+          </a:p>
+        </p:txBody>
+      </p:sp>
+      <p:sp>
+        <p:nvSpPr>
+          <p:cNvPr id="29" name="Shape 27"/>
+          <p:cNvSpPr/>
+          <p:nvPr/>
+        </p:nvSpPr>
+        <p:spPr>
+          <a:xfrm>
+            <a:off x="0" y="0"/>
+            <a:ext cx="12191695" cy="73152"/>
+          </a:xfrm>
+          <a:prstGeom prst="rect">
+            <a:avLst/>
+          </a:prstGeom>
+          <a:solidFill>
+            <a:srgbClr val="2563EB"/>
+          </a:solidFill>
+          <a:ln w="12700">
+            <a:solidFill>
+              <a:srgbClr val="2563EB"/>
+            </a:solidFill>
+            <a:prstDash val="solid"/>
+          </a:ln>
+        </p:spPr>
+      </p:sp>
+      <p:pic>
+        <p:nvPicPr>
+          <p:cNvPr id="30" name="Image 0" descr="/Users/muhammadrayandika/repo/document-agent/brand/logo.png">    </p:cNvPr>
+          <p:cNvPicPr>
+            <a:picLocks noChangeAspect="1"/>
+          </p:cNvPicPr>
+          <p:nvPr/>
+        </p:nvPicPr>
+        <p:blipFill>
+          <a:blip r:embed="rId1"/>
+          <a:stretch>
+            <a:fillRect/>
+          </a:stretch>
+        </p:blipFill>
+        <p:spPr>
+          <a:xfrm>
+            <a:off x="502920" y="274320"/>
+            <a:ext cx="411480" cy="411480"/>
+          </a:xfrm>
+          <a:prstGeom prst="rect">
+            <a:avLst/>
+          </a:prstGeom>
+        </p:spPr>
+      </p:pic>
+      <p:sp>
+        <p:nvSpPr>
+          <p:cNvPr id="31" name="Text 28"/>
+          <p:cNvSpPr/>
+          <p:nvPr/>
+        </p:nvSpPr>
+        <p:spPr>
+          <a:xfrm>
+            <a:off x="960120" y="292608"/>
+            <a:ext cx="2743200" cy="365760"/>
+          </a:xfrm>
+          <a:prstGeom prst="rect">
+            <a:avLst/>
+          </a:prstGeom>
+          <a:noFill/>
+          <a:ln/>
+        </p:spPr>
+        <p:txBody>
+          <a:bodyPr wrap="square" rtlCol="0" anchor="ctr"/>
+          <a:lstStyle/>
+          <a:p>
+            <a:pPr indent="0" marL="0">
+              <a:buNone/>
+            </a:pPr>
+            <a:r>
+              <a:rPr lang="en-US" sz="1200" b="1" dirty="0">
+                <a:solidFill>
+                  <a:srgbClr val="141B2E"/>
+                </a:solidFill>
+                <a:latin typeface="Calibri" pitchFamily="34" charset="0"/>
+                <a:ea typeface="Calibri" pitchFamily="34" charset="-122"/>
+                <a:cs typeface="Calibri" pitchFamily="34" charset="-120"/>
+              </a:rPr>
+              <a:t>OpenCraft</a:t>
+            </a:r>
+            <a:endParaRPr lang="en-US" sz="1200" dirty="0"/>
+          </a:p>
+        </p:txBody>
+      </p:sp>
+      <p:sp>
+        <p:nvSpPr>
+          <p:cNvPr id="32" name="Text 29"/>
+          <p:cNvSpPr/>
+          <p:nvPr/>
+        </p:nvSpPr>
+        <p:spPr>
+          <a:xfrm>
+            <a:off x="10820095" y="292608"/>
+            <a:ext cx="914400" cy="365760"/>
+          </a:xfrm>
+          <a:prstGeom prst="rect">
+            <a:avLst/>
+          </a:prstGeom>
+          <a:noFill/>
+          <a:ln/>
+        </p:spPr>
+        <p:txBody>
+          <a:bodyPr wrap="square" rtlCol="0" anchor="ctr"/>
+          <a:lstStyle/>
+          <a:p>
+            <a:pPr algn="r" indent="0" marL="0">
+              <a:buNone/>
+            </a:pPr>
+            <a:r>
+              <a:rPr lang="en-US" sz="1000" dirty="0">
+                <a:solidFill>
+                  <a:srgbClr val="B7BFCC"/>
+                </a:solidFill>
+                <a:latin typeface="Calibri" pitchFamily="34" charset="0"/>
+                <a:ea typeface="Calibri" pitchFamily="34" charset="-122"/>
+                <a:cs typeface="Calibri" pitchFamily="34" charset="-120"/>
+              </a:rPr>
+              <a:t>03 / 05</a:t>
+            </a:r>
+            <a:endParaRPr lang="en-US" sz="1000" dirty="0"/>
+          </a:p>
+        </p:txBody>
+      </p:sp>
+      <p:sp>
+        <p:nvSpPr>
+          <p:cNvPr id="33" name="Text 30"/>
+          <p:cNvSpPr/>
+          <p:nvPr/>
+        </p:nvSpPr>
+        <p:spPr>
+          <a:xfrm>
+            <a:off x="548640" y="6446520"/>
+            <a:ext cx="11094415" cy="274320"/>
+          </a:xfrm>
+          <a:prstGeom prst="rect">
+            <a:avLst/>
+          </a:prstGeom>
+          <a:noFill/>
+          <a:ln/>
+        </p:spPr>
+        <p:txBody>
+          <a:bodyPr wrap="square" rtlCol="0" anchor="ctr"/>
+          <a:lstStyle/>
+          <a:p>
+            <a:pPr indent="0" marL="0">
+              <a:buNone/>
+            </a:pPr>
+            <a:r>
+              <a:rPr lang="en-US" sz="800" spc="200" kern="0" dirty="0">
+                <a:solidFill>
+                  <a:srgbClr val="B7BFCC"/>
+                </a:solidFill>
+                <a:latin typeface="Calibri" pitchFamily="34" charset="0"/>
+                <a:ea typeface="Calibri" pitchFamily="34" charset="-122"/>
+                <a:cs typeface="Calibri" pitchFamily="34" charset="-120"/>
+              </a:rPr>
+              <a:t>OpenCraft · AI Transformation Company</a:t>
+            </a:r>
+            <a:endParaRPr lang="en-US" sz="800" dirty="0"/>
+          </a:p>
+        </p:txBody>
+      </p:sp>
+    </p:spTree>
+  </p:cSld>
+  <p:clrMapOvr>
+    <a:masterClrMapping/>
+  </p:clrMapOvr>
+</p:sld>
+</file>
+
+<file path=ppt/slides/slide4.xml><?xml version="1.0" encoding="utf-8"?>
+<p:sld xmlns:a="http://schemas.openxmlformats.org/drawingml/2006/main" xmlns:r="http://schemas.openxmlformats.org/officeDocument/2006/relationships" xmlns:p="http://schemas.openxmlformats.org/presentationml/2006/main">
+  <p:cSld name="Slide 4">
+    <p:bg>
+      <p:bgPr>
+        <a:solidFill>
+          <a:srgbClr val="FFFFFF"/>
+        </a:solidFill>
+      </p:bgPr>
+    </p:bg>
+    <p:spTree>
+      <p:nvGrpSpPr>
+        <p:cNvPr id="1" name=""/>
+        <p:cNvGrpSpPr/>
+        <p:nvPr/>
+      </p:nvGrpSpPr>
+      <p:grpSpPr>
+        <a:xfrm>
+          <a:off x="0" y="0"/>
+          <a:ext cx="0" cy="0"/>
+          <a:chOff x="0" y="0"/>
+          <a:chExt cx="0" cy="0"/>
+        </a:xfrm>
+      </p:grpSpPr>
+      <p:sp>
+        <p:nvSpPr>
+          <p:cNvPr id="2" name="Text 0"/>
+          <p:cNvSpPr/>
+          <p:nvPr/>
+        </p:nvSpPr>
+        <p:spPr>
+          <a:xfrm>
+            <a:off x="7162495" y="457200"/>
+            <a:ext cx="5029200" cy="6400800"/>
+          </a:xfrm>
+          <a:prstGeom prst="rect">
+            <a:avLst/>
+          </a:prstGeom>
+          <a:noFill/>
+          <a:ln/>
+        </p:spPr>
+        <p:txBody>
+          <a:bodyPr wrap="square" rtlCol="0" anchor="ctr"/>
+          <a:lstStyle/>
+          <a:p>
+            <a:pPr algn="r" indent="0" marL="0">
+              <a:buNone/>
+            </a:pPr>
+            <a:r>
+              <a:rPr lang="en-US" sz="48000" b="1" dirty="0">
+                <a:solidFill>
+                  <a:srgbClr val="2563EB">
+                    <a:alpha val="8000"/>
+                  </a:srgbClr>
+                </a:solidFill>
+                <a:latin typeface="Calibri" pitchFamily="34" charset="0"/>
+                <a:ea typeface="Calibri" pitchFamily="34" charset="-122"/>
+                <a:cs typeface="Calibri" pitchFamily="34" charset="-120"/>
+              </a:rPr>
+              <a:t>02</a:t>
+            </a:r>
+            <a:endParaRPr lang="en-US" sz="48000" dirty="0"/>
+          </a:p>
+        </p:txBody>
+      </p:sp>
+      <p:sp>
+        <p:nvSpPr>
+          <p:cNvPr id="3" name="Shape 1"/>
+          <p:cNvSpPr/>
+          <p:nvPr/>
+        </p:nvSpPr>
+        <p:spPr>
+          <a:xfrm>
+            <a:off x="10180015" y="-914400"/>
+            <a:ext cx="3200400" cy="3200400"/>
+          </a:xfrm>
+          <a:prstGeom prst="ellipse">
+            <a:avLst/>
+          </a:prstGeom>
+          <a:solidFill>
+            <a:srgbClr val="10A37F">
+              <a:alpha val="8000"/>
+            </a:srgbClr>
+          </a:solidFill>
+          <a:ln w="12700">
+            <a:solidFill>
+              <a:srgbClr val="10A37F">
+                <a:alpha val="8000"/>
+              </a:srgbClr>
+            </a:solidFill>
+            <a:prstDash val="solid"/>
+          </a:ln>
+        </p:spPr>
+      </p:sp>
+      <p:sp>
+        <p:nvSpPr>
+          <p:cNvPr id="4" name="Shape 2"/>
+          <p:cNvSpPr/>
+          <p:nvPr/>
+        </p:nvSpPr>
+        <p:spPr>
+          <a:xfrm>
+            <a:off x="10911535" y="-274320"/>
+            <a:ext cx="1828800" cy="1828800"/>
+          </a:xfrm>
+          <a:prstGeom prst="ellipse">
+            <a:avLst/>
+          </a:prstGeom>
+          <a:solidFill>
+            <a:srgbClr val="10A37F">
+              <a:alpha val="20000"/>
+            </a:srgbClr>
+          </a:solidFill>
+          <a:ln w="12700">
+            <a:solidFill>
+              <a:srgbClr val="10A37F">
+                <a:alpha val="20000"/>
+              </a:srgbClr>
+            </a:solidFill>
+            <a:prstDash val="solid"/>
+          </a:ln>
+        </p:spPr>
+      </p:sp>
+      <p:sp>
+        <p:nvSpPr>
+          <p:cNvPr id="5" name="Text 3"/>
+          <p:cNvSpPr/>
+          <p:nvPr/>
+        </p:nvSpPr>
+        <p:spPr>
+          <a:xfrm>
+            <a:off x="548640" y="1371600"/>
+            <a:ext cx="11094415" cy="457200"/>
+          </a:xfrm>
+          <a:prstGeom prst="rect">
+            <a:avLst/>
+          </a:prstGeom>
+          <a:noFill/>
+          <a:ln/>
+        </p:spPr>
+        <p:txBody>
+          <a:bodyPr wrap="square" rtlCol="0" anchor="ctr"/>
+          <a:lstStyle/>
+          <a:p>
+            <a:pPr indent="0" marL="0">
+              <a:buNone/>
+            </a:pPr>
+            <a:r>
+              <a:rPr lang="en-US" sz="1200" b="1" spc="600" kern="0" dirty="0">
+                <a:solidFill>
+                  <a:srgbClr val="2563EB"/>
+                </a:solidFill>
+                <a:latin typeface="Calibri" pitchFamily="34" charset="0"/>
+                <a:ea typeface="Calibri" pitchFamily="34" charset="-122"/>
+                <a:cs typeface="Calibri" pitchFamily="34" charset="-120"/>
+              </a:rPr>
+              <a:t>BAGIAN 02</a:t>
+            </a:r>
+            <a:endParaRPr lang="en-US" sz="1200" dirty="0"/>
+          </a:p>
+        </p:txBody>
+      </p:sp>
+      <p:sp>
+        <p:nvSpPr>
+          <p:cNvPr id="6" name="Text 4"/>
+          <p:cNvSpPr/>
+          <p:nvPr/>
+        </p:nvSpPr>
+        <p:spPr>
+          <a:xfrm>
+            <a:off x="548640" y="2194560"/>
+            <a:ext cx="11094415" cy="2011680"/>
+          </a:xfrm>
+          <a:prstGeom prst="rect">
+            <a:avLst/>
+          </a:prstGeom>
+          <a:noFill/>
+          <a:ln/>
+        </p:spPr>
+        <p:txBody>
+          <a:bodyPr wrap="square" rtlCol="0" anchor="t"/>
+          <a:lstStyle/>
+          <a:p>
+            <a:pPr indent="0" marL="0">
+              <a:buNone/>
+            </a:pPr>
+            <a:r>
+              <a:rPr lang="en-US" sz="4400" b="1" dirty="0">
+                <a:solidFill>
+                  <a:srgbClr val="141B2E"/>
+                </a:solidFill>
+                <a:latin typeface="Calibri" pitchFamily="34" charset="0"/>
+                <a:ea typeface="Calibri" pitchFamily="34" charset="-122"/>
+                <a:cs typeface="Calibri" pitchFamily="34" charset="-120"/>
+              </a:rPr>
+              <a:t>Customer Intelligence Platform.</a:t>
+            </a:r>
+            <a:endParaRPr lang="en-US" sz="4400" dirty="0"/>
+          </a:p>
+        </p:txBody>
+      </p:sp>
+      <p:sp>
+        <p:nvSpPr>
+          <p:cNvPr id="7" name="Shape 5"/>
+          <p:cNvSpPr/>
+          <p:nvPr/>
+        </p:nvSpPr>
+        <p:spPr>
+          <a:xfrm>
+            <a:off x="548640" y="4434840"/>
+            <a:ext cx="640080" cy="64008"/>
+          </a:xfrm>
+          <a:prstGeom prst="rect">
+            <a:avLst/>
+          </a:prstGeom>
+          <a:solidFill>
+            <a:srgbClr val="10A37F"/>
+          </a:solidFill>
+          <a:ln w="12700">
+            <a:solidFill>
+              <a:srgbClr val="10A37F"/>
+            </a:solidFill>
+            <a:prstDash val="solid"/>
+          </a:ln>
+        </p:spPr>
+      </p:sp>
+      <p:sp>
+        <p:nvSpPr>
+          <p:cNvPr id="8" name="Text 6"/>
+          <p:cNvSpPr/>
+          <p:nvPr/>
+        </p:nvSpPr>
+        <p:spPr>
+          <a:xfrm>
+            <a:off x="548640" y="4663440"/>
+            <a:ext cx="11094415" cy="1280160"/>
+          </a:xfrm>
+          <a:prstGeom prst="rect">
+            <a:avLst/>
+          </a:prstGeom>
+          <a:noFill/>
+          <a:ln/>
+        </p:spPr>
+        <p:txBody>
+          <a:bodyPr wrap="square" rtlCol="0" anchor="t"/>
+          <a:lstStyle/>
+          <a:p>
+            <a:pPr indent="0" marL="0">
+              <a:buNone/>
+            </a:pPr>
+            <a:r>
+              <a:rPr lang="en-US" sz="1700" dirty="0">
+                <a:solidFill>
+                  <a:srgbClr val="6E7990"/>
+                </a:solidFill>
+                <a:latin typeface="Calibri" pitchFamily="34" charset="0"/>
+                <a:ea typeface="Calibri" pitchFamily="34" charset="-122"/>
+                <a:cs typeface="Calibri" pitchFamily="34" charset="-120"/>
+              </a:rPr>
+              <a:t>Mengubah catatan percakapan, tiket, dan transaksi menjadi keputusan komersial yang aksi-nyata.</a:t>
+            </a:r>
+            <a:endParaRPr lang="en-US" sz="1700" dirty="0"/>
+          </a:p>
+        </p:txBody>
+      </p:sp>
+      <p:sp>
+        <p:nvSpPr>
+          <p:cNvPr id="9" name="Shape 7"/>
+          <p:cNvSpPr/>
+          <p:nvPr/>
+        </p:nvSpPr>
+        <p:spPr>
+          <a:xfrm>
+            <a:off x="0" y="0"/>
+            <a:ext cx="12191695" cy="73152"/>
+          </a:xfrm>
+          <a:prstGeom prst="rect">
+            <a:avLst/>
+          </a:prstGeom>
+          <a:solidFill>
+            <a:srgbClr val="2563EB"/>
+          </a:solidFill>
+          <a:ln w="12700">
+            <a:solidFill>
+              <a:srgbClr val="2563EB"/>
+            </a:solidFill>
+            <a:prstDash val="solid"/>
+          </a:ln>
+        </p:spPr>
+      </p:sp>
+      <p:pic>
+        <p:nvPicPr>
+          <p:cNvPr id="10" name="Image 0" descr="/Users/muhammadrayandika/repo/document-agent/brand/logo.png">    </p:cNvPr>
+          <p:cNvPicPr>
+            <a:picLocks noChangeAspect="1"/>
+          </p:cNvPicPr>
+          <p:nvPr/>
+        </p:nvPicPr>
+        <p:blipFill>
+          <a:blip r:embed="rId1"/>
+          <a:stretch>
+            <a:fillRect/>
+          </a:stretch>
+        </p:blipFill>
+        <p:spPr>
+          <a:xfrm>
+            <a:off x="502920" y="274320"/>
+            <a:ext cx="411480" cy="411480"/>
+          </a:xfrm>
+          <a:prstGeom prst="rect">
+            <a:avLst/>
+          </a:prstGeom>
+        </p:spPr>
+      </p:pic>
+      <p:sp>
+        <p:nvSpPr>
+          <p:cNvPr id="11" name="Text 8"/>
+          <p:cNvSpPr/>
+          <p:nvPr/>
+        </p:nvSpPr>
+        <p:spPr>
+          <a:xfrm>
+            <a:off x="960120" y="292608"/>
+            <a:ext cx="2743200" cy="365760"/>
+          </a:xfrm>
+          <a:prstGeom prst="rect">
+            <a:avLst/>
+          </a:prstGeom>
+          <a:noFill/>
+          <a:ln/>
+        </p:spPr>
+        <p:txBody>
+          <a:bodyPr wrap="square" rtlCol="0" anchor="ctr"/>
+          <a:lstStyle/>
+          <a:p>
+            <a:pPr indent="0" marL="0">
+              <a:buNone/>
+            </a:pPr>
+            <a:r>
+              <a:rPr lang="en-US" sz="1200" b="1" dirty="0">
+                <a:solidFill>
+                  <a:srgbClr val="141B2E"/>
+                </a:solidFill>
+                <a:latin typeface="Calibri" pitchFamily="34" charset="0"/>
+                <a:ea typeface="Calibri" pitchFamily="34" charset="-122"/>
+                <a:cs typeface="Calibri" pitchFamily="34" charset="-120"/>
+              </a:rPr>
+              <a:t>OpenCraft</a:t>
+            </a:r>
+            <a:endParaRPr lang="en-US" sz="1200" dirty="0"/>
+          </a:p>
+        </p:txBody>
+      </p:sp>
+      <p:sp>
+        <p:nvSpPr>
+          <p:cNvPr id="12" name="Text 9"/>
+          <p:cNvSpPr/>
+          <p:nvPr/>
+        </p:nvSpPr>
+        <p:spPr>
+          <a:xfrm>
+            <a:off x="10820095" y="292608"/>
+            <a:ext cx="914400" cy="365760"/>
+          </a:xfrm>
+          <a:prstGeom prst="rect">
+            <a:avLst/>
+          </a:prstGeom>
+          <a:noFill/>
+          <a:ln/>
+        </p:spPr>
+        <p:txBody>
+          <a:bodyPr wrap="square" rtlCol="0" anchor="ctr"/>
+          <a:lstStyle/>
+          <a:p>
+            <a:pPr algn="r" indent="0" marL="0">
+              <a:buNone/>
+            </a:pPr>
+            <a:r>
+              <a:rPr lang="en-US" sz="1000" dirty="0">
+                <a:solidFill>
+                  <a:srgbClr val="B7BFCC"/>
+                </a:solidFill>
+                <a:latin typeface="Calibri" pitchFamily="34" charset="0"/>
+                <a:ea typeface="Calibri" pitchFamily="34" charset="-122"/>
+                <a:cs typeface="Calibri" pitchFamily="34" charset="-120"/>
+              </a:rPr>
+              <a:t>04 / 05</a:t>
+            </a:r>
+            <a:endParaRPr lang="en-US" sz="1000" dirty="0"/>
+          </a:p>
+        </p:txBody>
+      </p:sp>
+      <p:sp>
+        <p:nvSpPr>
+          <p:cNvPr id="13" name="Text 10"/>
+          <p:cNvSpPr/>
+          <p:nvPr/>
+        </p:nvSpPr>
+        <p:spPr>
+          <a:xfrm>
+            <a:off x="548640" y="6446520"/>
+            <a:ext cx="11094415" cy="274320"/>
+          </a:xfrm>
+          <a:prstGeom prst="rect">
+            <a:avLst/>
+          </a:prstGeom>
+          <a:noFill/>
+          <a:ln/>
+        </p:spPr>
+        <p:txBody>
+          <a:bodyPr wrap="square" rtlCol="0" anchor="ctr"/>
+          <a:lstStyle/>
+          <a:p>
+            <a:pPr indent="0" marL="0">
+              <a:buNone/>
+            </a:pPr>
+            <a:r>
+              <a:rPr lang="en-US" sz="800" spc="200" kern="0" dirty="0">
+                <a:solidFill>
+                  <a:srgbClr val="B7BFCC"/>
+                </a:solidFill>
+                <a:latin typeface="Calibri" pitchFamily="34" charset="0"/>
+                <a:ea typeface="Calibri" pitchFamily="34" charset="-122"/>
+                <a:cs typeface="Calibri" pitchFamily="34" charset="-120"/>
+              </a:rPr>
+              <a:t>OpenCraft · AI Transformation Company</a:t>
+            </a:r>
+            <a:endParaRPr lang="en-US" sz="800" dirty="0"/>
+          </a:p>
+        </p:txBody>
+      </p:sp>
+    </p:spTree>
+  </p:cSld>
+  <p:clrMapOvr>
+    <a:masterClrMapping/>
+  </p:clrMapOvr>
+</p:sld>
+</file>
+
+<file path=ppt/slides/slide5.xml><?xml version="1.0" encoding="utf-8"?>
+<p:sld xmlns:a="http://schemas.openxmlformats.org/drawingml/2006/main" xmlns:r="http://schemas.openxmlformats.org/officeDocument/2006/relationships" xmlns:p="http://schemas.openxmlformats.org/presentationml/2006/main">
+  <p:cSld name="Slide 5">
     <p:bg>
       <p:bgPr>
         <a:solidFill>
@@ -1368,6 +3627,64 @@
         </p:nvSpPr>
         <p:spPr>
           <a:xfrm>
+            <a:off x="-1828800" y="-1828800"/>
+            <a:ext cx="4572000" cy="4572000"/>
+          </a:xfrm>
+          <a:prstGeom prst="ellipse">
+            <a:avLst/>
+          </a:prstGeom>
+          <a:solidFill>
+            <a:srgbClr val="2563EB">
+              <a:alpha val="15000"/>
+            </a:srgbClr>
+          </a:solidFill>
+          <a:ln w="12700">
+            <a:solidFill>
+              <a:srgbClr val="2563EB">
+                <a:alpha val="15000"/>
+              </a:srgbClr>
+            </a:solidFill>
+            <a:prstDash val="solid"/>
+          </a:ln>
+        </p:spPr>
+      </p:sp>
+      <p:sp>
+        <p:nvSpPr>
+          <p:cNvPr id="3" name="Shape 1"/>
+          <p:cNvSpPr/>
+          <p:nvPr/>
+        </p:nvSpPr>
+        <p:spPr>
+          <a:xfrm>
+            <a:off x="9448495" y="4114800"/>
+            <a:ext cx="4572000" cy="4572000"/>
+          </a:xfrm>
+          <a:prstGeom prst="ellipse">
+            <a:avLst/>
+          </a:prstGeom>
+          <a:solidFill>
+            <a:srgbClr val="10A37F">
+              <a:alpha val="15000"/>
+            </a:srgbClr>
+          </a:solidFill>
+          <a:ln w="12700">
+            <a:solidFill>
+              <a:srgbClr val="10A37F">
+                <a:alpha val="15000"/>
+              </a:srgbClr>
+            </a:solidFill>
+            <a:prstDash val="solid"/>
+          </a:ln>
+        </p:spPr>
+      </p:sp>
+      <p:sp>
+        <p:nvSpPr>
+          <p:cNvPr id="4" name="Shape 2"/>
+          <p:cNvSpPr/>
+          <p:nvPr/>
+        </p:nvSpPr>
+        <p:spPr>
+          <a:xfrm>
             <a:off x="0" y="6693408"/>
             <a:ext cx="12191695" cy="164592"/>
           </a:xfrm>
@@ -1387,7 +3704,7 @@
       </p:sp>
       <p:sp>
         <p:nvSpPr>
-          <p:cNvPr id="3" name="Text 1"/>
+          <p:cNvPr id="5" name="Text 3"/>
           <p:cNvSpPr/>
           <p:nvPr/>
         </p:nvSpPr>
@@ -1426,7 +3743,7 @@
       </p:sp>
       <p:sp>
         <p:nvSpPr>
-          <p:cNvPr id="4" name="Shape 2"/>
+          <p:cNvPr id="6" name="Shape 4"/>
           <p:cNvSpPr/>
           <p:nvPr/>
         </p:nvSpPr>
@@ -1451,7 +3768,7 @@
       </p:sp>
       <p:sp>
         <p:nvSpPr>
-          <p:cNvPr id="5" name="Text 3"/>
+          <p:cNvPr id="7" name="Text 5"/>
           <p:cNvSpPr/>
           <p:nvPr/>
         </p:nvSpPr>
@@ -1490,7 +3807,7 @@
       </p:sp>
       <p:sp>
         <p:nvSpPr>
-          <p:cNvPr id="6" name="Text 4"/>
+          <p:cNvPr id="8" name="Text 6"/>
           <p:cNvSpPr/>
           <p:nvPr/>
         </p:nvSpPr>
@@ -1529,7 +3846,7 @@
       </p:sp>
       <p:pic>
         <p:nvPicPr>
-          <p:cNvPr id="7" name="Image 0" descr="/Users/muhammadrayandika/repo/document-agent/brand/logo.png">    </p:cNvPr>
+          <p:cNvPr id="9" name="Image 0" descr="/Users/muhammadrayandika/repo/document-agent/brand/logo.png">    </p:cNvPr>
           <p:cNvPicPr>
             <a:picLocks noChangeAspect="1"/>
           </p:cNvPicPr>
@@ -1553,7 +3870,7 @@
       </p:pic>
       <p:sp>
         <p:nvSpPr>
-          <p:cNvPr id="8" name="Text 5"/>
+          <p:cNvPr id="10" name="Text 7"/>
           <p:cNvSpPr/>
           <p:nvPr/>
         </p:nvSpPr>
@@ -1592,7 +3909,7 @@
       </p:sp>
       <p:sp>
         <p:nvSpPr>
-          <p:cNvPr id="9" name="Text 6"/>
+          <p:cNvPr id="11" name="Text 8"/>
           <p:cNvSpPr/>
           <p:nvPr/>
         </p:nvSpPr>
